--- a/lectures/lecture03.pptx
+++ b/lectures/lecture03.pptx
@@ -11526,9 +11526,18 @@
                 <a:solidFill>
                   <a:srgbClr val="181D27"/>
                 </a:solidFill>
-                <a:latin typeface="Arial"/>
-              </a:rPr>
-              <a:t>`PolynomialFeatures(degree=2)` из десяти признаков делает шестьдесят шесть</a:t>
+                <a:latin typeface="Courier New"/>
+              </a:rPr>
+              <a:t>PolynomialFeatures(degree=2)</a:t>
+            </a:r>
+            <a:r>
+              <a:rPr sz="1800" b="0" i="0">
+                <a:solidFill>
+                  <a:srgbClr val="181D27"/>
+                </a:solidFill>
+                <a:latin typeface="Arial"/>
+              </a:rPr>
+              <a:t> из десяти признаков делает шестьдесят шесть</a:t>
             </a:r>
           </a:p>
           <a:p>
@@ -18052,9 +18061,18 @@
                 <a:solidFill>
                   <a:srgbClr val="181D27"/>
                 </a:solidFill>
-                <a:latin typeface="Arial"/>
-              </a:rPr>
-              <a:t>`число_обращений: +0.84` — чем больше обращений в поддержку, тем выше риск ухода</a:t>
+                <a:latin typeface="Courier New"/>
+              </a:rPr>
+              <a:t>число_обращений: +0.84</a:t>
+            </a:r>
+            <a:r>
+              <a:rPr sz="1800" b="0" i="0">
+                <a:solidFill>
+                  <a:srgbClr val="181D27"/>
+                </a:solidFill>
+                <a:latin typeface="Arial"/>
+              </a:rPr>
+              <a:t> — чем больше обращений в поддержку, тем выше риск ухода</a:t>
             </a:r>
           </a:p>
           <a:p>
@@ -18076,9 +18094,18 @@
                 <a:solidFill>
                   <a:srgbClr val="181D27"/>
                 </a:solidFill>
-                <a:latin typeface="Arial"/>
-              </a:rPr>
-              <a:t>`срок_с_нами: −0.61` — давние клиенты уходят реже</a:t>
+                <a:latin typeface="Courier New"/>
+              </a:rPr>
+              <a:t>срок_с_нами: −0.61</a:t>
+            </a:r>
+            <a:r>
+              <a:rPr sz="1800" b="0" i="0">
+                <a:solidFill>
+                  <a:srgbClr val="181D27"/>
+                </a:solidFill>
+                <a:latin typeface="Arial"/>
+              </a:rPr>
+              <a:t> — давние клиенты уходят реже</a:t>
             </a:r>
           </a:p>
           <a:p>
@@ -18100,9 +18127,18 @@
                 <a:solidFill>
                   <a:srgbClr val="181D27"/>
                 </a:solidFill>
-                <a:latin typeface="Arial"/>
-              </a:rPr>
-              <a:t>`средний_чек: −0.12` — влияет слабо, но в ту же сторону</a:t>
+                <a:latin typeface="Courier New"/>
+              </a:rPr>
+              <a:t>средний_чек: −0.12</a:t>
+            </a:r>
+            <a:r>
+              <a:rPr sz="1800" b="0" i="0">
+                <a:solidFill>
+                  <a:srgbClr val="181D27"/>
+                </a:solidFill>
+                <a:latin typeface="Arial"/>
+              </a:rPr>
+              <a:t> — влияет слабо, но в ту же сторону</a:t>
             </a:r>
           </a:p>
           <a:p>
@@ -18124,9 +18160,18 @@
                 <a:solidFill>
                   <a:srgbClr val="181D27"/>
                 </a:solidFill>
-                <a:latin typeface="Arial"/>
-              </a:rPr>
-              <a:t>`город_Москва: +0.03` — практически ничего не значит</a:t>
+                <a:latin typeface="Courier New"/>
+              </a:rPr>
+              <a:t>город_Москва: +0.03</a:t>
+            </a:r>
+            <a:r>
+              <a:rPr sz="1800" b="0" i="0">
+                <a:solidFill>
+                  <a:srgbClr val="181D27"/>
+                </a:solidFill>
+                <a:latin typeface="Arial"/>
+              </a:rPr>
+              <a:t> — практически ничего не значит</a:t>
             </a:r>
           </a:p>
           <a:p>

--- a/lectures/lecture03.pptx
+++ b/lectures/lecture03.pptx
@@ -3338,7 +3338,7 @@
           <a:p>
             <a:pPr algn="l"/>
             <a:r>
-              <a:rPr sz="1600" b="0" i="0">
+              <a:rPr sz="1700" b="0" i="0">
                 <a:solidFill>
                   <a:srgbClr val="181D27"/>
                 </a:solidFill>
@@ -3466,7 +3466,7 @@
             <a:r>
               <a:rPr sz="2000" b="0" i="0">
                 <a:solidFill>
-                  <a:srgbClr val="6B7484"/>
+                  <a:srgbClr val="181D27"/>
                 </a:solidFill>
                 <a:latin typeface="Arial"/>
               </a:rPr>
@@ -3920,9 +3920,9 @@
               </a:lnSpc>
             </a:pPr>
             <a:r>
-              <a:rPr sz="1700" b="0" i="0">
-                <a:solidFill>
-                  <a:srgbClr val="6B7484"/>
+              <a:rPr sz="1800" b="0" i="0">
+                <a:solidFill>
+                  <a:srgbClr val="181D27"/>
                 </a:solidFill>
                 <a:latin typeface="Arial"/>
               </a:rPr>
@@ -4022,9 +4022,9 @@
               </a:lnSpc>
             </a:pPr>
             <a:r>
-              <a:rPr sz="1700" b="0" i="0">
-                <a:solidFill>
-                  <a:srgbClr val="6B7484"/>
+              <a:rPr sz="1800" b="0" i="0">
+                <a:solidFill>
+                  <a:srgbClr val="181D27"/>
                 </a:solidFill>
                 <a:latin typeface="Arial"/>
               </a:rPr>
@@ -4225,7 +4225,7 @@
             <a:r>
               <a:rPr sz="1800" b="0" i="0">
                 <a:solidFill>
-                  <a:srgbClr val="6B7484"/>
+                  <a:srgbClr val="181D27"/>
                 </a:solidFill>
                 <a:latin typeface="Arial"/>
               </a:rPr>
@@ -4381,7 +4381,7 @@
             <a:r>
               <a:rPr sz="2000" b="0" i="0">
                 <a:solidFill>
-                  <a:srgbClr val="6B7484"/>
+                  <a:srgbClr val="181D27"/>
                 </a:solidFill>
                 <a:latin typeface="Arial"/>
               </a:rPr>
@@ -4540,9 +4540,9 @@
               <a:buChar char="·"/>
             </a:pPr>
             <a:r>
-              <a:rPr sz="1600" b="0" i="0">
-                <a:solidFill>
-                  <a:srgbClr val="6B7484"/>
+              <a:rPr sz="1700" b="0" i="0">
+                <a:solidFill>
+                  <a:srgbClr val="181D27"/>
                 </a:solidFill>
                 <a:latin typeface="Arial"/>
               </a:rPr>
@@ -4862,9 +4862,9 @@
               </a:lnSpc>
             </a:pPr>
             <a:r>
-              <a:rPr sz="1700" b="0" i="0">
-                <a:solidFill>
-                  <a:srgbClr val="6B7484"/>
+              <a:rPr sz="1800" b="0" i="0">
+                <a:solidFill>
+                  <a:srgbClr val="181D27"/>
                 </a:solidFill>
                 <a:latin typeface="Arial"/>
               </a:rPr>
@@ -5060,7 +5060,7 @@
             <a:r>
               <a:rPr sz="2000" b="0" i="0">
                 <a:solidFill>
-                  <a:srgbClr val="6B7484"/>
+                  <a:srgbClr val="181D27"/>
                 </a:solidFill>
                 <a:latin typeface="Arial"/>
               </a:rPr>
@@ -5085,8 +5085,8 @@
         </p:blipFill>
         <p:spPr>
           <a:xfrm>
-            <a:off x="1479786" y="2048256"/>
-            <a:ext cx="9232122" cy="3479800"/>
+            <a:off x="1525610" y="2048256"/>
+            <a:ext cx="9140475" cy="3445256"/>
           </a:xfrm>
           <a:prstGeom prst="rect">
             <a:avLst/>
@@ -5101,8 +5101,8 @@
         </p:nvSpPr>
         <p:spPr>
           <a:xfrm>
-            <a:off x="777240" y="5729224"/>
-            <a:ext cx="10637215" cy="827024"/>
+            <a:off x="777240" y="5694680"/>
+            <a:ext cx="10637215" cy="861568"/>
           </a:xfrm>
           <a:prstGeom prst="rect">
             <a:avLst/>
@@ -5121,9 +5121,9 @@
               </a:lnSpc>
             </a:pPr>
             <a:r>
-              <a:rPr sz="1600" b="0" i="0">
-                <a:solidFill>
-                  <a:srgbClr val="6B7484"/>
+              <a:rPr sz="1700" b="0" i="0">
+                <a:solidFill>
+                  <a:srgbClr val="181D27"/>
                 </a:solidFill>
                 <a:latin typeface="Arial"/>
               </a:rPr>
@@ -5322,7 +5322,7 @@
         <p:spPr>
           <a:xfrm>
             <a:off x="777240" y="5162085"/>
-            <a:ext cx="10637215" cy="827024"/>
+            <a:ext cx="10637215" cy="861568"/>
           </a:xfrm>
           <a:prstGeom prst="rect">
             <a:avLst/>
@@ -5341,9 +5341,9 @@
               </a:lnSpc>
             </a:pPr>
             <a:r>
-              <a:rPr sz="1600" b="0" i="0">
-                <a:solidFill>
-                  <a:srgbClr val="6B7484"/>
+              <a:rPr sz="1700" b="0" i="0">
+                <a:solidFill>
+                  <a:srgbClr val="181D27"/>
                 </a:solidFill>
                 <a:latin typeface="Arial"/>
               </a:rPr>
@@ -5700,7 +5700,7 @@
               </a:lnSpc>
             </a:pPr>
             <a:r>
-              <a:rPr sz="1600" b="0" i="0">
+              <a:rPr sz="1700" b="0" i="0">
                 <a:solidFill>
                   <a:srgbClr val="181D27"/>
                 </a:solidFill>
@@ -5735,7 +5735,7 @@
           <a:p>
             <a:pPr algn="l"/>
             <a:r>
-              <a:rPr sz="1600" b="1" i="0">
+              <a:rPr sz="1700" b="1" i="0">
                 <a:solidFill>
                   <a:srgbClr val="2B5CE6"/>
                 </a:solidFill>
@@ -5780,7 +5780,7 @@
               </a:lnSpc>
             </a:pPr>
             <a:r>
-              <a:rPr sz="1600" b="0" i="0">
+              <a:rPr sz="1700" b="0" i="0">
                 <a:solidFill>
                   <a:srgbClr val="181D27"/>
                 </a:solidFill>
@@ -5815,7 +5815,7 @@
           <a:p>
             <a:pPr algn="l"/>
             <a:r>
-              <a:rPr sz="1600" b="1" i="0">
+              <a:rPr sz="1700" b="1" i="0">
                 <a:solidFill>
                   <a:srgbClr val="2B5CE6"/>
                 </a:solidFill>
@@ -5860,7 +5860,7 @@
               </a:lnSpc>
             </a:pPr>
             <a:r>
-              <a:rPr sz="1600" b="0" i="0">
+              <a:rPr sz="1700" b="0" i="0">
                 <a:solidFill>
                   <a:srgbClr val="181D27"/>
                 </a:solidFill>
@@ -5895,7 +5895,7 @@
           <a:p>
             <a:pPr algn="l"/>
             <a:r>
-              <a:rPr sz="1600" b="1" i="0">
+              <a:rPr sz="1700" b="1" i="0">
                 <a:solidFill>
                   <a:srgbClr val="2B5CE6"/>
                 </a:solidFill>
@@ -5940,7 +5940,7 @@
               </a:lnSpc>
             </a:pPr>
             <a:r>
-              <a:rPr sz="1600" b="0" i="0">
+              <a:rPr sz="1700" b="0" i="0">
                 <a:solidFill>
                   <a:srgbClr val="181D27"/>
                 </a:solidFill>
@@ -5975,7 +5975,7 @@
           <a:p>
             <a:pPr algn="l"/>
             <a:r>
-              <a:rPr sz="1600" b="1" i="0">
+              <a:rPr sz="1700" b="1" i="0">
                 <a:solidFill>
                   <a:srgbClr val="2B5CE6"/>
                 </a:solidFill>
@@ -6010,9 +6010,9 @@
           <a:p>
             <a:pPr algn="ctr"/>
             <a:r>
-              <a:rPr sz="1700" b="0" i="1">
-                <a:solidFill>
-                  <a:srgbClr val="6B7484"/>
+              <a:rPr sz="1800" b="0" i="1">
+                <a:solidFill>
+                  <a:srgbClr val="181D27"/>
                 </a:solidFill>
                 <a:latin typeface="Arial"/>
               </a:rPr>
@@ -6214,7 +6214,7 @@
             <a:r>
               <a:rPr sz="1800" b="0" i="0">
                 <a:solidFill>
-                  <a:srgbClr val="6B7484"/>
+                  <a:srgbClr val="181D27"/>
                 </a:solidFill>
                 <a:latin typeface="Arial"/>
               </a:rPr>
@@ -6614,7 +6614,7 @@
               </a:lnSpc>
             </a:pPr>
             <a:r>
-              <a:rPr sz="1700" b="0" i="0">
+              <a:rPr sz="1800" b="0" i="0">
                 <a:solidFill>
                   <a:srgbClr val="181D27"/>
                 </a:solidFill>
@@ -7158,7 +7158,7 @@
               <a:buChar char="—"/>
             </a:pPr>
             <a:r>
-              <a:rPr sz="1600" b="0" i="0">
+              <a:rPr sz="1700" b="0" i="0">
                 <a:solidFill>
                   <a:srgbClr val="181D27"/>
                 </a:solidFill>
@@ -7182,7 +7182,7 @@
               <a:buChar char="—"/>
             </a:pPr>
             <a:r>
-              <a:rPr sz="1600" b="0" i="0">
+              <a:rPr sz="1700" b="0" i="0">
                 <a:solidFill>
                   <a:srgbClr val="181D27"/>
                 </a:solidFill>
@@ -7206,7 +7206,7 @@
               <a:buChar char="—"/>
             </a:pPr>
             <a:r>
-              <a:rPr sz="1600" b="0" i="0">
+              <a:rPr sz="1700" b="0" i="0">
                 <a:solidFill>
                   <a:srgbClr val="181D27"/>
                 </a:solidFill>
@@ -7275,7 +7275,7 @@
               <a:buChar char="—"/>
             </a:pPr>
             <a:r>
-              <a:rPr sz="1600" b="0" i="0">
+              <a:rPr sz="1700" b="0" i="0">
                 <a:solidFill>
                   <a:srgbClr val="181D27"/>
                 </a:solidFill>
@@ -7299,7 +7299,7 @@
               <a:buChar char="—"/>
             </a:pPr>
             <a:r>
-              <a:rPr sz="1600" b="0" i="0">
+              <a:rPr sz="1700" b="0" i="0">
                 <a:solidFill>
                   <a:srgbClr val="181D27"/>
                 </a:solidFill>
@@ -7323,7 +7323,7 @@
               <a:buChar char="—"/>
             </a:pPr>
             <a:r>
-              <a:rPr sz="1600" b="0" i="0">
+              <a:rPr sz="1700" b="0" i="0">
                 <a:solidFill>
                   <a:srgbClr val="181D27"/>
                 </a:solidFill>
@@ -7524,7 +7524,7 @@
         <p:spPr>
           <a:xfrm>
             <a:off x="777240" y="5216100"/>
-            <a:ext cx="10637215" cy="1103376"/>
+            <a:ext cx="10637215" cy="1155192"/>
           </a:xfrm>
           <a:prstGeom prst="rect">
             <a:avLst/>
@@ -7543,9 +7543,9 @@
               </a:lnSpc>
             </a:pPr>
             <a:r>
-              <a:rPr sz="1600" b="0" i="0">
-                <a:solidFill>
-                  <a:srgbClr val="6B7484"/>
+              <a:rPr sz="1700" b="0" i="0">
+                <a:solidFill>
+                  <a:srgbClr val="181D27"/>
                 </a:solidFill>
                 <a:latin typeface="Arial"/>
               </a:rPr>
@@ -7748,7 +7748,7 @@
                       <a:r>
                         <a:rPr sz="1500" b="1" i="0">
                           <a:solidFill>
-                            <a:srgbClr val="6B7484"/>
+                            <a:srgbClr val="181D27"/>
                           </a:solidFill>
                           <a:latin typeface="Arial"/>
                         </a:rPr>
@@ -7784,7 +7784,7 @@
                       <a:r>
                         <a:rPr sz="1500" b="1" i="0">
                           <a:solidFill>
-                            <a:srgbClr val="6B7484"/>
+                            <a:srgbClr val="181D27"/>
                           </a:solidFill>
                           <a:latin typeface="Arial"/>
                         </a:rPr>
@@ -7820,7 +7820,7 @@
                       <a:r>
                         <a:rPr sz="1500" b="1" i="0">
                           <a:solidFill>
-                            <a:srgbClr val="6B7484"/>
+                            <a:srgbClr val="181D27"/>
                           </a:solidFill>
                           <a:latin typeface="Arial"/>
                         </a:rPr>
@@ -8365,7 +8365,7 @@
             <a:r>
               <a:rPr sz="2000" b="0" i="0">
                 <a:solidFill>
-                  <a:srgbClr val="6B7484"/>
+                  <a:srgbClr val="181D27"/>
                 </a:solidFill>
                 <a:latin typeface="Arial"/>
               </a:rPr>
@@ -8542,9 +8542,9 @@
               <a:buChar char="·"/>
             </a:pPr>
             <a:r>
-              <a:rPr sz="1600" b="0" i="0">
-                <a:solidFill>
-                  <a:srgbClr val="6B7484"/>
+              <a:rPr sz="1700" b="0" i="0">
+                <a:solidFill>
+                  <a:srgbClr val="181D27"/>
                 </a:solidFill>
                 <a:latin typeface="Arial"/>
               </a:rPr>
@@ -8851,9 +8851,9 @@
               <a:buChar char="·"/>
             </a:pPr>
             <a:r>
-              <a:rPr sz="1600" b="0" i="0">
-                <a:solidFill>
-                  <a:srgbClr val="6B7484"/>
+              <a:rPr sz="1700" b="0" i="0">
+                <a:solidFill>
+                  <a:srgbClr val="181D27"/>
                 </a:solidFill>
                 <a:latin typeface="Arial"/>
               </a:rPr>
@@ -9003,9 +9003,9 @@
               </a:lnSpc>
             </a:pPr>
             <a:r>
-              <a:rPr sz="1700" b="0" i="0">
-                <a:solidFill>
-                  <a:srgbClr val="6B7484"/>
+              <a:rPr sz="1800" b="0" i="0">
+                <a:solidFill>
+                  <a:srgbClr val="181D27"/>
                 </a:solidFill>
                 <a:latin typeface="Arial"/>
               </a:rPr>
@@ -9206,7 +9206,7 @@
             <a:r>
               <a:rPr sz="1800" b="0" i="0">
                 <a:solidFill>
-                  <a:srgbClr val="6B7484"/>
+                  <a:srgbClr val="181D27"/>
                 </a:solidFill>
                 <a:latin typeface="Arial"/>
               </a:rPr>
@@ -9729,7 +9729,7 @@
               </a:lnSpc>
             </a:pPr>
             <a:r>
-              <a:rPr sz="1600" b="0" i="0">
+              <a:rPr sz="1700" b="0" i="0">
                 <a:solidFill>
                   <a:srgbClr val="181D27"/>
                 </a:solidFill>
@@ -9764,7 +9764,7 @@
           <a:p>
             <a:pPr algn="l"/>
             <a:r>
-              <a:rPr sz="1600" b="1" i="0">
+              <a:rPr sz="1700" b="1" i="0">
                 <a:solidFill>
                   <a:srgbClr val="2B5CE6"/>
                 </a:solidFill>
@@ -9809,7 +9809,7 @@
               </a:lnSpc>
             </a:pPr>
             <a:r>
-              <a:rPr sz="1600" b="0" i="0">
+              <a:rPr sz="1700" b="0" i="0">
                 <a:solidFill>
                   <a:srgbClr val="181D27"/>
                 </a:solidFill>
@@ -9844,7 +9844,7 @@
           <a:p>
             <a:pPr algn="l"/>
             <a:r>
-              <a:rPr sz="1600" b="1" i="0">
+              <a:rPr sz="1700" b="1" i="0">
                 <a:solidFill>
                   <a:srgbClr val="2B5CE6"/>
                 </a:solidFill>
@@ -9889,7 +9889,7 @@
               </a:lnSpc>
             </a:pPr>
             <a:r>
-              <a:rPr sz="1600" b="0" i="0">
+              <a:rPr sz="1700" b="0" i="0">
                 <a:solidFill>
                   <a:srgbClr val="181D27"/>
                 </a:solidFill>
@@ -9924,7 +9924,7 @@
           <a:p>
             <a:pPr algn="l"/>
             <a:r>
-              <a:rPr sz="1600" b="1" i="0">
+              <a:rPr sz="1700" b="1" i="0">
                 <a:solidFill>
                   <a:srgbClr val="2B5CE6"/>
                 </a:solidFill>
@@ -9969,7 +9969,7 @@
               </a:lnSpc>
             </a:pPr>
             <a:r>
-              <a:rPr sz="1600" b="0" i="0">
+              <a:rPr sz="1700" b="0" i="0">
                 <a:solidFill>
                   <a:srgbClr val="181D27"/>
                 </a:solidFill>
@@ -10004,7 +10004,7 @@
           <a:p>
             <a:pPr algn="l"/>
             <a:r>
-              <a:rPr sz="1600" b="1" i="0">
+              <a:rPr sz="1700" b="1" i="0">
                 <a:solidFill>
                   <a:srgbClr val="2B5CE6"/>
                 </a:solidFill>
@@ -10039,9 +10039,9 @@
           <a:p>
             <a:pPr algn="ctr"/>
             <a:r>
-              <a:rPr sz="1700" b="0" i="1">
-                <a:solidFill>
-                  <a:srgbClr val="6B7484"/>
+              <a:rPr sz="1800" b="0" i="1">
+                <a:solidFill>
+                  <a:srgbClr val="181D27"/>
                 </a:solidFill>
                 <a:latin typeface="Arial"/>
               </a:rPr>
@@ -10243,7 +10243,7 @@
             <a:r>
               <a:rPr sz="1800" b="0" i="0">
                 <a:solidFill>
-                  <a:srgbClr val="6B7484"/>
+                  <a:srgbClr val="181D27"/>
                 </a:solidFill>
                 <a:latin typeface="Arial"/>
               </a:rPr>
@@ -10261,7 +10261,7 @@
         <p:spPr>
           <a:xfrm>
             <a:off x="777240" y="2487168"/>
-            <a:ext cx="10637215" cy="461010"/>
+            <a:ext cx="10637215" cy="448056"/>
           </a:xfrm>
           <a:prstGeom prst="roundRect">
             <a:avLst>
@@ -10305,7 +10305,7 @@
         </p:nvSpPr>
         <p:spPr>
           <a:xfrm>
-            <a:off x="1051560" y="2580513"/>
+            <a:off x="1051560" y="2574036"/>
             <a:ext cx="457200" cy="292608"/>
           </a:xfrm>
           <a:prstGeom prst="rect">
@@ -10340,8 +10340,8 @@
         </p:nvSpPr>
         <p:spPr>
           <a:xfrm>
-            <a:off x="777240" y="3057906"/>
-            <a:ext cx="10637215" cy="461010"/>
+            <a:off x="777240" y="3044952"/>
+            <a:ext cx="10637215" cy="448056"/>
           </a:xfrm>
           <a:prstGeom prst="roundRect">
             <a:avLst>
@@ -10387,7 +10387,7 @@
         </p:nvSpPr>
         <p:spPr>
           <a:xfrm>
-            <a:off x="1051560" y="3151251"/>
+            <a:off x="1051560" y="3131820"/>
             <a:ext cx="457200" cy="292608"/>
           </a:xfrm>
           <a:prstGeom prst="rect">
@@ -10422,7 +10422,7 @@
         </p:nvSpPr>
         <p:spPr>
           <a:xfrm>
-            <a:off x="10317175" y="3169539"/>
+            <a:off x="10317175" y="3150108"/>
             <a:ext cx="822960" cy="274320"/>
           </a:xfrm>
           <a:prstGeom prst="rect">
@@ -10457,8 +10457,8 @@
         </p:nvSpPr>
         <p:spPr>
           <a:xfrm>
-            <a:off x="777240" y="3628644"/>
-            <a:ext cx="10637215" cy="461010"/>
+            <a:off x="777240" y="3602736"/>
+            <a:ext cx="10637215" cy="448056"/>
           </a:xfrm>
           <a:prstGeom prst="roundRect">
             <a:avLst>
@@ -10502,7 +10502,7 @@
         </p:nvSpPr>
         <p:spPr>
           <a:xfrm>
-            <a:off x="1051560" y="3721989"/>
+            <a:off x="1051560" y="3689604"/>
             <a:ext cx="457200" cy="292608"/>
           </a:xfrm>
           <a:prstGeom prst="rect">
@@ -10537,8 +10537,8 @@
         </p:nvSpPr>
         <p:spPr>
           <a:xfrm>
-            <a:off x="777240" y="4199382"/>
-            <a:ext cx="10637215" cy="461010"/>
+            <a:off x="777240" y="4160520"/>
+            <a:ext cx="10637215" cy="448056"/>
           </a:xfrm>
           <a:prstGeom prst="roundRect">
             <a:avLst>
@@ -10582,7 +10582,7 @@
         </p:nvSpPr>
         <p:spPr>
           <a:xfrm>
-            <a:off x="1051560" y="4292727"/>
+            <a:off x="1051560" y="4247388"/>
             <a:ext cx="457200" cy="292608"/>
           </a:xfrm>
           <a:prstGeom prst="rect">
@@ -10617,8 +10617,8 @@
         </p:nvSpPr>
         <p:spPr>
           <a:xfrm>
-            <a:off x="777240" y="4898136"/>
-            <a:ext cx="10637215" cy="1356360"/>
+            <a:off x="777240" y="4846320"/>
+            <a:ext cx="10637215" cy="1408176"/>
           </a:xfrm>
           <a:prstGeom prst="roundRect">
             <a:avLst>
@@ -10643,7 +10643,7 @@
               </a:lnSpc>
             </a:pPr>
             <a:r>
-              <a:rPr sz="1700" b="0" i="0">
+              <a:rPr sz="1800" b="0" i="0">
                 <a:solidFill>
                   <a:srgbClr val="181D27"/>
                 </a:solidFill>
@@ -10846,7 +10846,7 @@
             <a:r>
               <a:rPr sz="1800" b="0" i="0">
                 <a:solidFill>
-                  <a:srgbClr val="6B7484"/>
+                  <a:srgbClr val="181D27"/>
                 </a:solidFill>
                 <a:latin typeface="Arial"/>
               </a:rPr>
@@ -11030,7 +11030,7 @@
               <a:buChar char="—"/>
             </a:pPr>
             <a:r>
-              <a:rPr sz="1600" b="0" i="0">
+              <a:rPr sz="1700" b="0" i="0">
                 <a:solidFill>
                   <a:srgbClr val="181D27"/>
                 </a:solidFill>
@@ -11054,7 +11054,7 @@
               <a:buChar char="—"/>
             </a:pPr>
             <a:r>
-              <a:rPr sz="1600" b="0" i="0">
+              <a:rPr sz="1700" b="0" i="0">
                 <a:solidFill>
                   <a:srgbClr val="181D27"/>
                 </a:solidFill>
@@ -11078,7 +11078,7 @@
               <a:buChar char="—"/>
             </a:pPr>
             <a:r>
-              <a:rPr sz="1600" b="1" i="0">
+              <a:rPr sz="1700" b="1" i="0">
                 <a:solidFill>
                   <a:srgbClr val="181D27"/>
                 </a:solidFill>
@@ -11087,7 +11087,7 @@
               <a:t>Лечение:</a:t>
             </a:r>
             <a:r>
-              <a:rPr sz="1600" b="0" i="0">
+              <a:rPr sz="1700" b="0" i="0">
                 <a:solidFill>
                   <a:srgbClr val="181D27"/>
                 </a:solidFill>
@@ -11156,7 +11156,7 @@
               <a:buChar char="—"/>
             </a:pPr>
             <a:r>
-              <a:rPr sz="1600" b="0" i="0">
+              <a:rPr sz="1700" b="0" i="0">
                 <a:solidFill>
                   <a:srgbClr val="181D27"/>
                 </a:solidFill>
@@ -11180,7 +11180,7 @@
               <a:buChar char="—"/>
             </a:pPr>
             <a:r>
-              <a:rPr sz="1600" b="0" i="0">
+              <a:rPr sz="1700" b="0" i="0">
                 <a:solidFill>
                   <a:srgbClr val="181D27"/>
                 </a:solidFill>
@@ -11204,7 +11204,7 @@
               <a:buChar char="—"/>
             </a:pPr>
             <a:r>
-              <a:rPr sz="1600" b="1" i="0">
+              <a:rPr sz="1700" b="1" i="0">
                 <a:solidFill>
                   <a:srgbClr val="181D27"/>
                 </a:solidFill>
@@ -11213,7 +11213,7 @@
               <a:t>Лечение:</a:t>
             </a:r>
             <a:r>
-              <a:rPr sz="1600" b="0" i="0">
+              <a:rPr sz="1700" b="0" i="0">
                 <a:solidFill>
                   <a:srgbClr val="181D27"/>
                 </a:solidFill>
@@ -11411,7 +11411,7 @@
             <a:r>
               <a:rPr sz="2000" b="0" i="0">
                 <a:solidFill>
-                  <a:srgbClr val="6B7484"/>
+                  <a:srgbClr val="181D27"/>
                 </a:solidFill>
                 <a:latin typeface="Arial"/>
               </a:rPr>
@@ -11925,9 +11925,9 @@
               </a:lnSpc>
             </a:pPr>
             <a:r>
-              <a:rPr sz="1600" b="0" i="0">
-                <a:solidFill>
-                  <a:srgbClr val="6B7484"/>
+              <a:rPr sz="1700" b="0" i="0">
+                <a:solidFill>
+                  <a:srgbClr val="181D27"/>
                 </a:solidFill>
                 <a:latin typeface="Arial"/>
               </a:rPr>
@@ -12123,7 +12123,7 @@
             <a:r>
               <a:rPr sz="2000" b="0" i="0">
                 <a:solidFill>
-                  <a:srgbClr val="6B7484"/>
+                  <a:srgbClr val="181D27"/>
                 </a:solidFill>
                 <a:latin typeface="Arial"/>
               </a:rPr>
@@ -12148,8 +12148,8 @@
         </p:blipFill>
         <p:spPr>
           <a:xfrm>
-            <a:off x="2111347" y="2048256"/>
-            <a:ext cx="7969001" cy="3203448"/>
+            <a:off x="2175796" y="2048256"/>
+            <a:ext cx="7840102" cy="3151632"/>
           </a:xfrm>
           <a:prstGeom prst="rect">
             <a:avLst/>
@@ -12164,8 +12164,8 @@
         </p:nvSpPr>
         <p:spPr>
           <a:xfrm>
-            <a:off x="777240" y="5452872"/>
-            <a:ext cx="10637215" cy="1103376"/>
+            <a:off x="777240" y="5401056"/>
+            <a:ext cx="10637215" cy="1155192"/>
           </a:xfrm>
           <a:prstGeom prst="rect">
             <a:avLst/>
@@ -12184,9 +12184,9 @@
               </a:lnSpc>
             </a:pPr>
             <a:r>
-              <a:rPr sz="1600" b="0" i="0">
-                <a:solidFill>
-                  <a:srgbClr val="6B7484"/>
+              <a:rPr sz="1700" b="0" i="0">
+                <a:solidFill>
+                  <a:srgbClr val="181D27"/>
                 </a:solidFill>
                 <a:latin typeface="Arial"/>
               </a:rPr>
@@ -12387,7 +12387,7 @@
             <a:r>
               <a:rPr sz="1800" b="0" i="0">
                 <a:solidFill>
-                  <a:srgbClr val="6B7484"/>
+                  <a:srgbClr val="181D27"/>
                 </a:solidFill>
                 <a:latin typeface="Arial"/>
               </a:rPr>
@@ -12604,9 +12604,9 @@
               </a:lnSpc>
             </a:pPr>
             <a:r>
-              <a:rPr sz="1700" b="0" i="0">
-                <a:solidFill>
-                  <a:srgbClr val="6B7484"/>
+              <a:rPr sz="1800" b="0" i="0">
+                <a:solidFill>
+                  <a:srgbClr val="181D27"/>
                 </a:solidFill>
                 <a:latin typeface="Arial"/>
               </a:rPr>
@@ -12944,9 +12944,9 @@
               </a:lnSpc>
             </a:pPr>
             <a:r>
-              <a:rPr sz="1700" b="0" i="0">
-                <a:solidFill>
-                  <a:srgbClr val="6B7484"/>
+              <a:rPr sz="1800" b="0" i="0">
+                <a:solidFill>
+                  <a:srgbClr val="181D27"/>
                 </a:solidFill>
                 <a:latin typeface="Arial"/>
               </a:rPr>
@@ -13191,7 +13191,7 @@
               </a:lnSpc>
             </a:pPr>
             <a:r>
-              <a:rPr sz="1600" b="0" i="0">
+              <a:rPr sz="1700" b="0" i="0">
                 <a:solidFill>
                   <a:srgbClr val="181D27"/>
                 </a:solidFill>
@@ -13226,7 +13226,7 @@
           <a:p>
             <a:pPr algn="l"/>
             <a:r>
-              <a:rPr sz="1600" b="1" i="0">
+              <a:rPr sz="1700" b="1" i="0">
                 <a:solidFill>
                   <a:srgbClr val="2B5CE6"/>
                 </a:solidFill>
@@ -13271,7 +13271,7 @@
               </a:lnSpc>
             </a:pPr>
             <a:r>
-              <a:rPr sz="1600" b="0" i="0">
+              <a:rPr sz="1700" b="0" i="0">
                 <a:solidFill>
                   <a:srgbClr val="181D27"/>
                 </a:solidFill>
@@ -13306,7 +13306,7 @@
           <a:p>
             <a:pPr algn="l"/>
             <a:r>
-              <a:rPr sz="1600" b="1" i="0">
+              <a:rPr sz="1700" b="1" i="0">
                 <a:solidFill>
                   <a:srgbClr val="2B5CE6"/>
                 </a:solidFill>
@@ -13351,7 +13351,7 @@
               </a:lnSpc>
             </a:pPr>
             <a:r>
-              <a:rPr sz="1600" b="0" i="0">
+              <a:rPr sz="1700" b="0" i="0">
                 <a:solidFill>
                   <a:srgbClr val="181D27"/>
                 </a:solidFill>
@@ -13386,7 +13386,7 @@
           <a:p>
             <a:pPr algn="l"/>
             <a:r>
-              <a:rPr sz="1600" b="1" i="0">
+              <a:rPr sz="1700" b="1" i="0">
                 <a:solidFill>
                   <a:srgbClr val="2B5CE6"/>
                 </a:solidFill>
@@ -13431,7 +13431,7 @@
               </a:lnSpc>
             </a:pPr>
             <a:r>
-              <a:rPr sz="1600" b="0" i="0">
+              <a:rPr sz="1700" b="0" i="0">
                 <a:solidFill>
                   <a:srgbClr val="181D27"/>
                 </a:solidFill>
@@ -13466,7 +13466,7 @@
           <a:p>
             <a:pPr algn="l"/>
             <a:r>
-              <a:rPr sz="1600" b="1" i="0">
+              <a:rPr sz="1700" b="1" i="0">
                 <a:solidFill>
                   <a:srgbClr val="2B5CE6"/>
                 </a:solidFill>
@@ -13501,9 +13501,9 @@
           <a:p>
             <a:pPr algn="ctr"/>
             <a:r>
-              <a:rPr sz="1700" b="0" i="1">
-                <a:solidFill>
-                  <a:srgbClr val="6B7484"/>
+              <a:rPr sz="1800" b="0" i="1">
+                <a:solidFill>
+                  <a:srgbClr val="181D27"/>
                 </a:solidFill>
                 <a:latin typeface="Arial"/>
               </a:rPr>
@@ -13705,7 +13705,7 @@
             <a:r>
               <a:rPr sz="1800" b="0" i="0">
                 <a:solidFill>
-                  <a:srgbClr val="6B7484"/>
+                  <a:srgbClr val="181D27"/>
                 </a:solidFill>
                 <a:latin typeface="Arial"/>
               </a:rPr>
@@ -13723,7 +13723,7 @@
         <p:spPr>
           <a:xfrm>
             <a:off x="777240" y="2487168"/>
-            <a:ext cx="10637215" cy="461010"/>
+            <a:ext cx="10637215" cy="448056"/>
           </a:xfrm>
           <a:prstGeom prst="roundRect">
             <a:avLst>
@@ -13767,7 +13767,7 @@
         </p:nvSpPr>
         <p:spPr>
           <a:xfrm>
-            <a:off x="1051560" y="2580513"/>
+            <a:off x="1051560" y="2574036"/>
             <a:ext cx="457200" cy="292608"/>
           </a:xfrm>
           <a:prstGeom prst="rect">
@@ -13802,8 +13802,8 @@
         </p:nvSpPr>
         <p:spPr>
           <a:xfrm>
-            <a:off x="777240" y="3057906"/>
-            <a:ext cx="10637215" cy="461010"/>
+            <a:off x="777240" y="3044952"/>
+            <a:ext cx="10637215" cy="448056"/>
           </a:xfrm>
           <a:prstGeom prst="roundRect">
             <a:avLst>
@@ -13849,7 +13849,7 @@
         </p:nvSpPr>
         <p:spPr>
           <a:xfrm>
-            <a:off x="1051560" y="3151251"/>
+            <a:off x="1051560" y="3131820"/>
             <a:ext cx="457200" cy="292608"/>
           </a:xfrm>
           <a:prstGeom prst="rect">
@@ -13884,7 +13884,7 @@
         </p:nvSpPr>
         <p:spPr>
           <a:xfrm>
-            <a:off x="10317175" y="3169539"/>
+            <a:off x="10317175" y="3150108"/>
             <a:ext cx="822960" cy="274320"/>
           </a:xfrm>
           <a:prstGeom prst="rect">
@@ -13919,8 +13919,8 @@
         </p:nvSpPr>
         <p:spPr>
           <a:xfrm>
-            <a:off x="777240" y="3628644"/>
-            <a:ext cx="10637215" cy="461010"/>
+            <a:off x="777240" y="3602736"/>
+            <a:ext cx="10637215" cy="448056"/>
           </a:xfrm>
           <a:prstGeom prst="roundRect">
             <a:avLst>
@@ -13964,7 +13964,7 @@
         </p:nvSpPr>
         <p:spPr>
           <a:xfrm>
-            <a:off x="1051560" y="3721989"/>
+            <a:off x="1051560" y="3689604"/>
             <a:ext cx="457200" cy="292608"/>
           </a:xfrm>
           <a:prstGeom prst="rect">
@@ -13999,8 +13999,8 @@
         </p:nvSpPr>
         <p:spPr>
           <a:xfrm>
-            <a:off x="777240" y="4199382"/>
-            <a:ext cx="10637215" cy="461010"/>
+            <a:off x="777240" y="4160520"/>
+            <a:ext cx="10637215" cy="448056"/>
           </a:xfrm>
           <a:prstGeom prst="roundRect">
             <a:avLst>
@@ -14044,7 +14044,7 @@
         </p:nvSpPr>
         <p:spPr>
           <a:xfrm>
-            <a:off x="1051560" y="4292727"/>
+            <a:off x="1051560" y="4247388"/>
             <a:ext cx="457200" cy="292608"/>
           </a:xfrm>
           <a:prstGeom prst="rect">
@@ -14079,8 +14079,8 @@
         </p:nvSpPr>
         <p:spPr>
           <a:xfrm>
-            <a:off x="777240" y="4898136"/>
-            <a:ext cx="10637215" cy="1356360"/>
+            <a:off x="777240" y="4846320"/>
+            <a:ext cx="10637215" cy="1408176"/>
           </a:xfrm>
           <a:prstGeom prst="roundRect">
             <a:avLst>
@@ -14105,7 +14105,7 @@
               </a:lnSpc>
             </a:pPr>
             <a:r>
-              <a:rPr sz="1700" b="0" i="0">
+              <a:rPr sz="1800" b="0" i="0">
                 <a:solidFill>
                   <a:srgbClr val="181D27"/>
                 </a:solidFill>
@@ -14303,7 +14303,7 @@
             <a:r>
               <a:rPr sz="2000" b="0" i="0">
                 <a:solidFill>
-                  <a:srgbClr val="6B7484"/>
+                  <a:srgbClr val="181D27"/>
                 </a:solidFill>
                 <a:latin typeface="Arial"/>
               </a:rPr>
@@ -14328,8 +14328,8 @@
         </p:blipFill>
         <p:spPr>
           <a:xfrm>
-            <a:off x="1503517" y="2048256"/>
-            <a:ext cx="9184661" cy="3203448"/>
+            <a:off x="1577798" y="2048256"/>
+            <a:ext cx="9036098" cy="3151632"/>
           </a:xfrm>
           <a:prstGeom prst="rect">
             <a:avLst/>
@@ -14344,8 +14344,8 @@
         </p:nvSpPr>
         <p:spPr>
           <a:xfrm>
-            <a:off x="777240" y="5452872"/>
-            <a:ext cx="10637215" cy="1103376"/>
+            <a:off x="777240" y="5401056"/>
+            <a:ext cx="10637215" cy="1155192"/>
           </a:xfrm>
           <a:prstGeom prst="rect">
             <a:avLst/>
@@ -14364,9 +14364,9 @@
               </a:lnSpc>
             </a:pPr>
             <a:r>
-              <a:rPr sz="1600" b="0" i="0">
-                <a:solidFill>
-                  <a:srgbClr val="6B7484"/>
+              <a:rPr sz="1700" b="0" i="0">
+                <a:solidFill>
+                  <a:srgbClr val="181D27"/>
                 </a:solidFill>
                 <a:latin typeface="Arial"/>
               </a:rPr>
@@ -14686,9 +14686,9 @@
               </a:lnSpc>
             </a:pPr>
             <a:r>
-              <a:rPr sz="1700" b="0" i="0">
-                <a:solidFill>
-                  <a:srgbClr val="6B7484"/>
+              <a:rPr sz="1800" b="0" i="0">
+                <a:solidFill>
+                  <a:srgbClr val="181D27"/>
                 </a:solidFill>
                 <a:latin typeface="Arial"/>
               </a:rPr>
@@ -15037,9 +15037,9 @@
               <a:buChar char="·"/>
             </a:pPr>
             <a:r>
-              <a:rPr sz="1600" b="0" i="0">
-                <a:solidFill>
-                  <a:srgbClr val="6B7484"/>
+              <a:rPr sz="1700" b="0" i="0">
+                <a:solidFill>
+                  <a:srgbClr val="181D27"/>
                 </a:solidFill>
                 <a:latin typeface="Arial"/>
               </a:rPr>
@@ -15235,7 +15235,7 @@
             <a:r>
               <a:rPr sz="2000" b="0" i="0">
                 <a:solidFill>
-                  <a:srgbClr val="6B7484"/>
+                  <a:srgbClr val="181D27"/>
                 </a:solidFill>
                 <a:latin typeface="Arial"/>
               </a:rPr>
@@ -15445,9 +15445,9 @@
               <a:buChar char="·"/>
             </a:pPr>
             <a:r>
-              <a:rPr sz="1600" b="0" i="0">
-                <a:solidFill>
-                  <a:srgbClr val="6B7484"/>
+              <a:rPr sz="1700" b="0" i="0">
+                <a:solidFill>
+                  <a:srgbClr val="181D27"/>
                 </a:solidFill>
                 <a:latin typeface="Arial"/>
               </a:rPr>
@@ -15648,7 +15648,7 @@
             <a:r>
               <a:rPr sz="1800" b="0" i="0">
                 <a:solidFill>
-                  <a:srgbClr val="6B7484"/>
+                  <a:srgbClr val="181D27"/>
                 </a:solidFill>
                 <a:latin typeface="Arial"/>
               </a:rPr>
@@ -15853,7 +15853,7 @@
               </a:lnSpc>
             </a:pPr>
             <a:r>
-              <a:rPr sz="1600" b="0" i="0">
+              <a:rPr sz="1700" b="0" i="0">
                 <a:solidFill>
                   <a:srgbClr val="181D27"/>
                 </a:solidFill>
@@ -15888,7 +15888,7 @@
           <a:p>
             <a:pPr algn="l"/>
             <a:r>
-              <a:rPr sz="1600" b="1" i="0">
+              <a:rPr sz="1700" b="1" i="0">
                 <a:solidFill>
                   <a:srgbClr val="2B5CE6"/>
                 </a:solidFill>
@@ -15933,7 +15933,7 @@
               </a:lnSpc>
             </a:pPr>
             <a:r>
-              <a:rPr sz="1600" b="0" i="0">
+              <a:rPr sz="1700" b="0" i="0">
                 <a:solidFill>
                   <a:srgbClr val="181D27"/>
                 </a:solidFill>
@@ -15968,7 +15968,7 @@
           <a:p>
             <a:pPr algn="l"/>
             <a:r>
-              <a:rPr sz="1600" b="1" i="0">
+              <a:rPr sz="1700" b="1" i="0">
                 <a:solidFill>
                   <a:srgbClr val="2B5CE6"/>
                 </a:solidFill>
@@ -16013,7 +16013,7 @@
               </a:lnSpc>
             </a:pPr>
             <a:r>
-              <a:rPr sz="1600" b="0" i="0">
+              <a:rPr sz="1700" b="0" i="0">
                 <a:solidFill>
                   <a:srgbClr val="181D27"/>
                 </a:solidFill>
@@ -16048,7 +16048,7 @@
           <a:p>
             <a:pPr algn="l"/>
             <a:r>
-              <a:rPr sz="1600" b="1" i="0">
+              <a:rPr sz="1700" b="1" i="0">
                 <a:solidFill>
                   <a:srgbClr val="2B5CE6"/>
                 </a:solidFill>
@@ -16093,7 +16093,7 @@
               </a:lnSpc>
             </a:pPr>
             <a:r>
-              <a:rPr sz="1600" b="0" i="0">
+              <a:rPr sz="1700" b="0" i="0">
                 <a:solidFill>
                   <a:srgbClr val="181D27"/>
                 </a:solidFill>
@@ -16128,7 +16128,7 @@
           <a:p>
             <a:pPr algn="l"/>
             <a:r>
-              <a:rPr sz="1600" b="1" i="0">
+              <a:rPr sz="1700" b="1" i="0">
                 <a:solidFill>
                   <a:srgbClr val="2B5CE6"/>
                 </a:solidFill>
@@ -16163,9 +16163,9 @@
           <a:p>
             <a:pPr algn="ctr"/>
             <a:r>
-              <a:rPr sz="1700" b="0" i="1">
-                <a:solidFill>
-                  <a:srgbClr val="6B7484"/>
+              <a:rPr sz="1800" b="0" i="1">
+                <a:solidFill>
+                  <a:srgbClr val="181D27"/>
                 </a:solidFill>
                 <a:latin typeface="Arial"/>
               </a:rPr>
@@ -16367,7 +16367,7 @@
             <a:r>
               <a:rPr sz="1800" b="0" i="0">
                 <a:solidFill>
-                  <a:srgbClr val="6B7484"/>
+                  <a:srgbClr val="181D27"/>
                 </a:solidFill>
                 <a:latin typeface="Arial"/>
               </a:rPr>
@@ -16385,7 +16385,7 @@
         <p:spPr>
           <a:xfrm>
             <a:off x="777240" y="2487168"/>
-            <a:ext cx="10637215" cy="387604"/>
+            <a:ext cx="10637215" cy="384048"/>
           </a:xfrm>
           <a:prstGeom prst="roundRect">
             <a:avLst>
@@ -16429,7 +16429,7 @@
         </p:nvSpPr>
         <p:spPr>
           <a:xfrm>
-            <a:off x="1051560" y="2543810"/>
+            <a:off x="1051560" y="2542032"/>
             <a:ext cx="457200" cy="292608"/>
           </a:xfrm>
           <a:prstGeom prst="rect">
@@ -16464,8 +16464,8 @@
         </p:nvSpPr>
         <p:spPr>
           <a:xfrm>
-            <a:off x="777240" y="2984500"/>
-            <a:ext cx="10637215" cy="387604"/>
+            <a:off x="777240" y="2980944"/>
+            <a:ext cx="10637215" cy="384048"/>
           </a:xfrm>
           <a:prstGeom prst="roundRect">
             <a:avLst>
@@ -16511,7 +16511,7 @@
         </p:nvSpPr>
         <p:spPr>
           <a:xfrm>
-            <a:off x="1051560" y="3041142"/>
+            <a:off x="1051560" y="3035808"/>
             <a:ext cx="457200" cy="292608"/>
           </a:xfrm>
           <a:prstGeom prst="rect">
@@ -16546,7 +16546,7 @@
         </p:nvSpPr>
         <p:spPr>
           <a:xfrm>
-            <a:off x="10317175" y="3059430"/>
+            <a:off x="10317175" y="3054096"/>
             <a:ext cx="822960" cy="274320"/>
           </a:xfrm>
           <a:prstGeom prst="rect">
@@ -16581,8 +16581,8 @@
         </p:nvSpPr>
         <p:spPr>
           <a:xfrm>
-            <a:off x="777240" y="3481832"/>
-            <a:ext cx="10637215" cy="387604"/>
+            <a:off x="777240" y="3474720"/>
+            <a:ext cx="10637215" cy="384048"/>
           </a:xfrm>
           <a:prstGeom prst="roundRect">
             <a:avLst>
@@ -16626,7 +16626,7 @@
         </p:nvSpPr>
         <p:spPr>
           <a:xfrm>
-            <a:off x="1051560" y="3538474"/>
+            <a:off x="1051560" y="3529584"/>
             <a:ext cx="457200" cy="292608"/>
           </a:xfrm>
           <a:prstGeom prst="rect">
@@ -16661,8 +16661,8 @@
         </p:nvSpPr>
         <p:spPr>
           <a:xfrm>
-            <a:off x="777240" y="3979164"/>
-            <a:ext cx="10637215" cy="387604"/>
+            <a:off x="777240" y="3968496"/>
+            <a:ext cx="10637215" cy="384048"/>
           </a:xfrm>
           <a:prstGeom prst="roundRect">
             <a:avLst>
@@ -16706,7 +16706,7 @@
         </p:nvSpPr>
         <p:spPr>
           <a:xfrm>
-            <a:off x="1051560" y="4035806"/>
+            <a:off x="1051560" y="4023360"/>
             <a:ext cx="457200" cy="292608"/>
           </a:xfrm>
           <a:prstGeom prst="rect">
@@ -16741,8 +16741,8 @@
         </p:nvSpPr>
         <p:spPr>
           <a:xfrm>
-            <a:off x="777240" y="4604512"/>
-            <a:ext cx="10637215" cy="1649984"/>
+            <a:off x="777240" y="4590288"/>
+            <a:ext cx="10637215" cy="1664208"/>
           </a:xfrm>
           <a:prstGeom prst="roundRect">
             <a:avLst>
@@ -16767,7 +16767,7 @@
               </a:lnSpc>
             </a:pPr>
             <a:r>
-              <a:rPr sz="1700" b="0" i="0">
+              <a:rPr sz="1800" b="0" i="0">
                 <a:solidFill>
                   <a:srgbClr val="181D27"/>
                 </a:solidFill>
@@ -16968,7 +16968,7 @@
         <p:spPr>
           <a:xfrm>
             <a:off x="777240" y="4958076"/>
-            <a:ext cx="10637215" cy="827024"/>
+            <a:ext cx="10637215" cy="1155192"/>
           </a:xfrm>
           <a:prstGeom prst="rect">
             <a:avLst/>
@@ -16987,9 +16987,9 @@
               </a:lnSpc>
             </a:pPr>
             <a:r>
-              <a:rPr sz="1600" b="0" i="0">
-                <a:solidFill>
-                  <a:srgbClr val="6B7484"/>
+              <a:rPr sz="1700" b="0" i="0">
+                <a:solidFill>
+                  <a:srgbClr val="181D27"/>
                 </a:solidFill>
                 <a:latin typeface="Arial"/>
               </a:rPr>
@@ -17246,9 +17246,9 @@
               </a:lnSpc>
             </a:pPr>
             <a:r>
-              <a:rPr sz="1700" b="0" i="0">
-                <a:solidFill>
-                  <a:srgbClr val="6B7484"/>
+              <a:rPr sz="1800" b="0" i="0">
+                <a:solidFill>
+                  <a:srgbClr val="181D27"/>
                 </a:solidFill>
                 <a:latin typeface="Arial"/>
               </a:rPr>
@@ -17505,9 +17505,9 @@
               </a:lnSpc>
             </a:pPr>
             <a:r>
-              <a:rPr sz="1700" b="0" i="0">
-                <a:solidFill>
-                  <a:srgbClr val="6B7484"/>
+              <a:rPr sz="1800" b="0" i="0">
+                <a:solidFill>
+                  <a:srgbClr val="181D27"/>
                 </a:solidFill>
                 <a:latin typeface="Arial"/>
               </a:rPr>
@@ -18012,7 +18012,7 @@
             <a:r>
               <a:rPr sz="2000" b="0" i="0">
                 <a:solidFill>
-                  <a:srgbClr val="6B7484"/>
+                  <a:srgbClr val="181D27"/>
                 </a:solidFill>
                 <a:latin typeface="Arial"/>
               </a:rPr>
@@ -18429,7 +18429,7 @@
             <a:r>
               <a:rPr sz="2000" b="0" i="0">
                 <a:solidFill>
-                  <a:srgbClr val="6B7484"/>
+                  <a:srgbClr val="181D27"/>
                 </a:solidFill>
                 <a:latin typeface="Arial"/>
               </a:rPr>
@@ -18454,8 +18454,8 @@
         </p:blipFill>
         <p:spPr>
           <a:xfrm>
-            <a:off x="1845917" y="2048256"/>
-            <a:ext cx="8499861" cy="3203448"/>
+            <a:off x="1914660" y="2048256"/>
+            <a:ext cx="8362376" cy="3151632"/>
           </a:xfrm>
           <a:prstGeom prst="rect">
             <a:avLst/>
@@ -18470,8 +18470,8 @@
         </p:nvSpPr>
         <p:spPr>
           <a:xfrm>
-            <a:off x="777240" y="5452872"/>
-            <a:ext cx="10637215" cy="1103376"/>
+            <a:off x="777240" y="5401056"/>
+            <a:ext cx="10637215" cy="1155192"/>
           </a:xfrm>
           <a:prstGeom prst="rect">
             <a:avLst/>
@@ -18490,9 +18490,9 @@
               </a:lnSpc>
             </a:pPr>
             <a:r>
-              <a:rPr sz="1600" b="0" i="0">
-                <a:solidFill>
-                  <a:srgbClr val="6B7484"/>
+              <a:rPr sz="1700" b="0" i="0">
+                <a:solidFill>
+                  <a:srgbClr val="181D27"/>
                 </a:solidFill>
                 <a:latin typeface="Arial"/>
               </a:rPr>
@@ -18688,7 +18688,7 @@
             <a:r>
               <a:rPr sz="2000" b="0" i="0">
                 <a:solidFill>
-                  <a:srgbClr val="6B7484"/>
+                  <a:srgbClr val="181D27"/>
                 </a:solidFill>
                 <a:latin typeface="Arial"/>
               </a:rPr>
@@ -18734,7 +18734,7 @@
                       <a:r>
                         <a:rPr sz="1500" b="1" i="0">
                           <a:solidFill>
-                            <a:srgbClr val="6B7484"/>
+                            <a:srgbClr val="181D27"/>
                           </a:solidFill>
                           <a:latin typeface="Arial"/>
                         </a:rPr>
@@ -18770,7 +18770,7 @@
                       <a:r>
                         <a:rPr sz="1500" b="1" i="0">
                           <a:solidFill>
-                            <a:srgbClr val="6B7484"/>
+                            <a:srgbClr val="181D27"/>
                           </a:solidFill>
                           <a:latin typeface="Arial"/>
                         </a:rPr>
@@ -18806,7 +18806,7 @@
                       <a:r>
                         <a:rPr sz="1500" b="1" i="0">
                           <a:solidFill>
-                            <a:srgbClr val="6B7484"/>
+                            <a:srgbClr val="181D27"/>
                           </a:solidFill>
                           <a:latin typeface="Arial"/>
                         </a:rPr>
@@ -19920,9 +19920,9 @@
               <a:buChar char="·"/>
             </a:pPr>
             <a:r>
-              <a:rPr sz="1600" b="0" i="0">
-                <a:solidFill>
-                  <a:srgbClr val="6B7484"/>
+              <a:rPr sz="1700" b="0" i="0">
+                <a:solidFill>
+                  <a:srgbClr val="181D27"/>
                 </a:solidFill>
                 <a:latin typeface="Arial"/>
               </a:rPr>
@@ -20118,7 +20118,7 @@
             <a:r>
               <a:rPr sz="2000" b="0" i="0">
                 <a:solidFill>
-                  <a:srgbClr val="6B7484"/>
+                  <a:srgbClr val="181D27"/>
                 </a:solidFill>
                 <a:latin typeface="Arial"/>
               </a:rPr>
@@ -20328,9 +20328,9 @@
               <a:buChar char="·"/>
             </a:pPr>
             <a:r>
-              <a:rPr sz="1600" b="0" i="0">
-                <a:solidFill>
-                  <a:srgbClr val="6B7484"/>
+              <a:rPr sz="1700" b="0" i="0">
+                <a:solidFill>
+                  <a:srgbClr val="181D27"/>
                 </a:solidFill>
                 <a:latin typeface="Arial"/>
               </a:rPr>
@@ -20809,9 +20809,9 @@
               </a:lnSpc>
             </a:pPr>
             <a:r>
-              <a:rPr sz="1600" b="0" i="0">
-                <a:solidFill>
-                  <a:srgbClr val="6B7484"/>
+              <a:rPr sz="1700" b="0" i="0">
+                <a:solidFill>
+                  <a:srgbClr val="181D27"/>
                 </a:solidFill>
                 <a:latin typeface="Arial"/>
               </a:rPr>
@@ -21536,7 +21536,7 @@
               <a:buChar char="—"/>
             </a:pPr>
             <a:r>
-              <a:rPr sz="1600" b="0" i="0">
+              <a:rPr sz="1700" b="0" i="0">
                 <a:solidFill>
                   <a:srgbClr val="181D27"/>
                 </a:solidFill>
@@ -21560,7 +21560,7 @@
               <a:buChar char="—"/>
             </a:pPr>
             <a:r>
-              <a:rPr sz="1600" b="0" i="0">
+              <a:rPr sz="1700" b="0" i="0">
                 <a:solidFill>
                   <a:srgbClr val="181D27"/>
                 </a:solidFill>
@@ -21569,7 +21569,7 @@
               <a:t>Сдача </a:t>
             </a:r>
             <a:r>
-              <a:rPr sz="1600" b="1" i="0">
+              <a:rPr sz="1700" b="1" i="0">
                 <a:solidFill>
                   <a:srgbClr val="181D27"/>
                 </a:solidFill>
@@ -21593,7 +21593,7 @@
               <a:buChar char="—"/>
             </a:pPr>
             <a:r>
-              <a:rPr sz="1600" b="0" i="0">
+              <a:rPr sz="1700" b="0" i="0">
                 <a:solidFill>
                   <a:srgbClr val="181D27"/>
                 </a:solidFill>
@@ -21675,7 +21675,7 @@
               <a:buChar char="—"/>
             </a:pPr>
             <a:r>
-              <a:rPr sz="1600" b="0" i="0">
+              <a:rPr sz="1700" b="0" i="0">
                 <a:solidFill>
                   <a:srgbClr val="181D27"/>
                 </a:solidFill>
@@ -21699,7 +21699,7 @@
               <a:buChar char="—"/>
             </a:pPr>
             <a:r>
-              <a:rPr sz="1600" b="0" i="0">
+              <a:rPr sz="1700" b="0" i="0">
                 <a:solidFill>
                   <a:srgbClr val="181D27"/>
                 </a:solidFill>
@@ -21723,7 +21723,7 @@
               <a:buChar char="—"/>
             </a:pPr>
             <a:r>
-              <a:rPr sz="1600" b="0" i="0">
+              <a:rPr sz="1700" b="0" i="0">
                 <a:solidFill>
                   <a:srgbClr val="181D27"/>
                 </a:solidFill>
@@ -21982,9 +21982,9 @@
               </a:lnSpc>
             </a:pPr>
             <a:r>
-              <a:rPr sz="1700" b="0" i="0">
-                <a:solidFill>
-                  <a:srgbClr val="6B7484"/>
+              <a:rPr sz="1800" b="0" i="0">
+                <a:solidFill>
+                  <a:srgbClr val="181D27"/>
                 </a:solidFill>
                 <a:latin typeface="Arial"/>
               </a:rPr>
@@ -22180,7 +22180,7 @@
             <a:r>
               <a:rPr sz="2000" b="0" i="0">
                 <a:solidFill>
-                  <a:srgbClr val="6B7484"/>
+                  <a:srgbClr val="181D27"/>
                 </a:solidFill>
                 <a:latin typeface="Arial"/>
               </a:rPr>
@@ -22354,9 +22354,9 @@
               <a:buChar char="·"/>
             </a:pPr>
             <a:r>
-              <a:rPr sz="1600" b="0" i="0">
-                <a:solidFill>
-                  <a:srgbClr val="6B7484"/>
+              <a:rPr sz="1700" b="0" i="0">
+                <a:solidFill>
+                  <a:srgbClr val="181D27"/>
                 </a:solidFill>
                 <a:latin typeface="Arial"/>
               </a:rPr>
@@ -22593,7 +22593,7 @@
               <a:buChar char="—"/>
             </a:pPr>
             <a:r>
-              <a:rPr sz="1600" b="0" i="0">
+              <a:rPr sz="1700" b="0" i="0">
                 <a:solidFill>
                   <a:srgbClr val="181D27"/>
                 </a:solidFill>
@@ -22617,7 +22617,7 @@
               <a:buChar char="—"/>
             </a:pPr>
             <a:r>
-              <a:rPr sz="1600" b="0" i="0">
+              <a:rPr sz="1700" b="0" i="0">
                 <a:solidFill>
                   <a:srgbClr val="181D27"/>
                 </a:solidFill>
@@ -22641,7 +22641,7 @@
               <a:buChar char="—"/>
             </a:pPr>
             <a:r>
-              <a:rPr sz="1600" b="0" i="0">
+              <a:rPr sz="1700" b="0" i="0">
                 <a:solidFill>
                   <a:srgbClr val="181D27"/>
                 </a:solidFill>
@@ -22665,7 +22665,7 @@
               <a:buChar char="—"/>
             </a:pPr>
             <a:r>
-              <a:rPr sz="1600" b="0" i="0">
+              <a:rPr sz="1700" b="0" i="0">
                 <a:solidFill>
                   <a:srgbClr val="181D27"/>
                 </a:solidFill>
@@ -22747,7 +22747,7 @@
               <a:buChar char="—"/>
             </a:pPr>
             <a:r>
-              <a:rPr sz="1600" b="0" i="0">
+              <a:rPr sz="1700" b="0" i="0">
                 <a:solidFill>
                   <a:srgbClr val="181D27"/>
                 </a:solidFill>
@@ -22771,7 +22771,7 @@
               <a:buChar char="—"/>
             </a:pPr>
             <a:r>
-              <a:rPr sz="1600" b="0" i="0">
+              <a:rPr sz="1700" b="0" i="0">
                 <a:solidFill>
                   <a:srgbClr val="181D27"/>
                 </a:solidFill>
@@ -22780,7 +22780,7 @@
               <a:t>Если выбросы есть — берут </a:t>
             </a:r>
             <a:r>
-              <a:rPr sz="1600" b="1" i="0">
+              <a:rPr sz="1700" b="1" i="0">
                 <a:solidFill>
                   <a:srgbClr val="181D27"/>
                 </a:solidFill>
@@ -22789,7 +22789,7 @@
               <a:t>MAE</a:t>
             </a:r>
             <a:r>
-              <a:rPr sz="1600" b="0" i="0">
+              <a:rPr sz="1700" b="0" i="0">
                 <a:solidFill>
                   <a:srgbClr val="181D27"/>
                 </a:solidFill>
@@ -22798,7 +22798,7 @@
               <a:t> (модуль) или </a:t>
             </a:r>
             <a:r>
-              <a:rPr sz="1600" b="1" i="0">
+              <a:rPr sz="1700" b="1" i="0">
                 <a:solidFill>
                   <a:srgbClr val="181D27"/>
                 </a:solidFill>
@@ -22807,7 +22807,7 @@
               <a:t>Huber</a:t>
             </a:r>
             <a:r>
-              <a:rPr sz="1600" b="0" i="0">
+              <a:rPr sz="1700" b="0" i="0">
                 <a:solidFill>
                   <a:srgbClr val="181D27"/>
                 </a:solidFill>
@@ -23105,9 +23105,9 @@
               </a:lnSpc>
             </a:pPr>
             <a:r>
-              <a:rPr sz="1700" b="0" i="0">
-                <a:solidFill>
-                  <a:srgbClr val="6B7484"/>
+              <a:rPr sz="1800" b="0" i="0">
+                <a:solidFill>
+                  <a:srgbClr val="181D27"/>
                 </a:solidFill>
                 <a:latin typeface="Arial"/>
               </a:rPr>
@@ -23144,9 +23144,9 @@
               </a:lnSpc>
             </a:pPr>
             <a:r>
-              <a:rPr sz="1700" b="0" i="0">
-                <a:solidFill>
-                  <a:srgbClr val="6B7484"/>
+              <a:rPr sz="1800" b="0" i="0">
+                <a:solidFill>
+                  <a:srgbClr val="181D27"/>
                 </a:solidFill>
                 <a:latin typeface="Arial"/>
               </a:rPr>
@@ -23183,9 +23183,9 @@
               </a:lnSpc>
             </a:pPr>
             <a:r>
-              <a:rPr sz="1700" b="0" i="0">
-                <a:solidFill>
-                  <a:srgbClr val="6B7484"/>
+              <a:rPr sz="1800" b="0" i="0">
+                <a:solidFill>
+                  <a:srgbClr val="181D27"/>
                 </a:solidFill>
                 <a:latin typeface="Arial"/>
               </a:rPr>
